--- a/exports/pptx/lessons/senior-module-01-what-is-iks/day-08-project-session-1.pptx
+++ b/exports/pptx/lessons/senior-module-01-what-is-iks/day-08-project-session-1.pptx
@@ -10,9 +10,10 @@
     <p:sldId id="258" r:id="rId4"/>
     <p:sldId id="259" r:id="rId5"/>
     <p:sldId id="260" r:id="rId6"/>
+    <p:sldId id="261" r:id="rId7"/>
   </p:sldIdLst>
   <p:notesMasterIdLst>
-    <p:notesMasterId r:id="rId7"/>
+    <p:notesMasterId r:id="rId8"/>
   </p:notesMasterIdLst>
   <p:sldSz cx="9144000" cy="5143500"/>
   <p:notesSz cx="5143500" cy="9144000"/>
@@ -882,6 +883,94 @@
             <a:fld id="{F7021451-1387-4CA6-816F-3879F97B5CBC}" type="slidenum">
               <a:rPr lang="en-US"/>
               <a:t>5</a:t>
+            </a:fld>
+            <a:endParaRPr lang="en-US"/>
+          </a:p>
+        </p:txBody>
+      </p:sp>
+    </p:spTree>
+    <p:extLst>
+      <p:ext uri="{BB962C8B-B14F-4D97-AF65-F5344CB8AC3E}">
+        <p14:creationId xmlns:p14="http://schemas.microsoft.com/office/powerpoint/2010/main" val="1024086991"/>
+      </p:ext>
+    </p:extLst>
+  </p:cSld>
+  <p:clrMapOvr>
+    <a:masterClrMapping/>
+  </p:clrMapOvr>
+</p:notes>
+</file>
+
+<file path=ppt/notesSlides/notesSlide6.xml><?xml version="1.0" encoding="utf-8"?>
+<p:notes xmlns:a="http://schemas.openxmlformats.org/drawingml/2006/main" xmlns:r="http://schemas.openxmlformats.org/officeDocument/2006/relationships" xmlns:p="http://schemas.openxmlformats.org/presentationml/2006/main">
+  <p:cSld>
+    <p:spTree>
+      <p:nvGrpSpPr>
+        <p:cNvPr id="1" name=""/>
+        <p:cNvGrpSpPr/>
+        <p:nvPr/>
+      </p:nvGrpSpPr>
+      <p:grpSpPr>
+        <a:xfrm>
+          <a:off x="0" y="0"/>
+          <a:ext cx="0" cy="0"/>
+          <a:chOff x="0" y="0"/>
+          <a:chExt cx="0" cy="0"/>
+        </a:xfrm>
+      </p:grpSpPr>
+      <p:sp>
+        <p:nvSpPr>
+          <p:cNvPr id="2" name="Slide Image Placeholder 1"/>
+          <p:cNvSpPr>
+            <a:spLocks noGrp="1" noRot="1" noChangeAspect="1"/>
+          </p:cNvSpPr>
+          <p:nvPr>
+            <p:ph type="sldImg"/>
+          </p:nvPr>
+        </p:nvSpPr>
+        <p:spPr/>
+      </p:sp>
+      <p:sp>
+        <p:nvSpPr>
+          <p:cNvPr id="3" name="Notes Placeholder 2"/>
+          <p:cNvSpPr>
+            <a:spLocks noGrp="1"/>
+          </p:cNvSpPr>
+          <p:nvPr>
+            <p:ph type="body" idx="1"/>
+          </p:nvPr>
+        </p:nvSpPr>
+        <p:spPr/>
+        <p:txBody>
+          <a:bodyPr/>
+          <a:lstStyle/>
+          <a:p>
+            <a:r>
+              <a:rPr lang="en-US" dirty="0"/>
+              <a:t/>
+            </a:r>
+            <a:endParaRPr lang="en-US" dirty="0"/>
+          </a:p>
+        </p:txBody>
+      </p:sp>
+      <p:sp>
+        <p:nvSpPr>
+          <p:cNvPr id="4" name="Slide Number Placeholder 3"/>
+          <p:cNvSpPr>
+            <a:spLocks noGrp="1"/>
+          </p:cNvSpPr>
+          <p:nvPr>
+            <p:ph type="sldNum" sz="quarter" idx="10"/>
+          </p:nvPr>
+        </p:nvSpPr>
+        <p:spPr/>
+        <p:txBody>
+          <a:bodyPr/>
+          <a:lstStyle/>
+          <a:p>
+            <a:fld id="{F7021451-1387-4CA6-816F-3879F97B5CBC}" type="slidenum">
+              <a:rPr lang="en-US"/>
+              <a:t>6</a:t>
             </a:fld>
             <a:endParaRPr lang="en-US"/>
           </a:p>
@@ -1431,102 +1520,6 @@
         </p:nvSpPr>
         <p:spPr>
           <a:xfrm>
-            <a:off x="406301" y="1223963"/>
-            <a:ext cx="8498026" cy="274290"/>
-          </a:xfrm>
-          <a:prstGeom prst="rect">
-            <a:avLst/>
-          </a:prstGeom>
-          <a:noFill/>
-          <a:ln/>
-        </p:spPr>
-        <p:txBody>
-          <a:bodyPr wrap="square" lIns="0" tIns="0" rIns="0" bIns="0" rtlCol="0" anchor="t"/>
-          <a:lstStyle/>
-          <a:p>
-            <a:pPr algn="l" indent="0" marL="0">
-              <a:lnSpc>
-                <a:spcPts val="2160"/>
-              </a:lnSpc>
-              <a:spcBef>
-                <a:spcPts val="600"/>
-              </a:spcBef>
-              <a:spcAft>
-                <a:spcPts val="800"/>
-              </a:spcAft>
-              <a:buNone/>
-            </a:pPr>
-            <a:r>
-              <a:rPr lang="en-US" sz="1800" b="1" dirty="0">
-                <a:solidFill>
-                  <a:srgbClr val="997929"/>
-                </a:solidFill>
-                <a:latin typeface="Times New Roman" pitchFamily="34" charset="0"/>
-                <a:ea typeface="Times New Roman" pitchFamily="34" charset="-122"/>
-                <a:cs typeface="Times New Roman" pitchFamily="34" charset="-120"/>
-              </a:rPr>
-              <a:t>Learning objective</a:t>
-            </a:r>
-            <a:endParaRPr lang="en-US" sz="1800" dirty="0"/>
-          </a:p>
-        </p:txBody>
-      </p:sp>
-      <p:sp>
-        <p:nvSpPr>
-          <p:cNvPr id="6" name="Text 4"/>
-          <p:cNvSpPr/>
-          <p:nvPr/>
-        </p:nvSpPr>
-        <p:spPr>
-          <a:xfrm>
-            <a:off x="406301" y="1637854"/>
-            <a:ext cx="8498026" cy="213271"/>
-          </a:xfrm>
-          <a:prstGeom prst="rect">
-            <a:avLst/>
-          </a:prstGeom>
-          <a:noFill/>
-          <a:ln/>
-        </p:spPr>
-        <p:txBody>
-          <a:bodyPr wrap="square" lIns="0" tIns="0" rIns="0" bIns="0" rtlCol="0" anchor="t"/>
-          <a:lstStyle/>
-          <a:p>
-            <a:pPr algn="l" indent="0" marL="0">
-              <a:lnSpc>
-                <a:spcPts val="1680"/>
-              </a:lnSpc>
-              <a:spcBef>
-                <a:spcPts val="300"/>
-              </a:spcBef>
-              <a:spcAft>
-                <a:spcPts val="300"/>
-              </a:spcAft>
-              <a:buNone/>
-            </a:pPr>
-            <a:r>
-              <a:rPr lang="en-US" sz="1200" dirty="0">
-                <a:solidFill>
-                  <a:srgbClr val="1A1A1A"/>
-                </a:solidFill>
-                <a:latin typeface="Georgia" pitchFamily="34" charset="0"/>
-                <a:ea typeface="Georgia" pitchFamily="34" charset="-122"/>
-                <a:cs typeface="Georgia" pitchFamily="34" charset="-120"/>
-              </a:rPr>
-              <a:t>Students refine thesis, complete outline, identify the strongest counter-argument.</a:t>
-            </a:r>
-            <a:endParaRPr lang="en-US" sz="1200" dirty="0"/>
-          </a:p>
-        </p:txBody>
-      </p:sp>
-      <p:sp>
-        <p:nvSpPr>
-          <p:cNvPr id="7" name="Text 5"/>
-          <p:cNvSpPr/>
-          <p:nvPr/>
-        </p:nvSpPr>
-        <p:spPr>
-          <a:xfrm>
             <a:off x="406301" y="4434929"/>
             <a:ext cx="8498026" cy="213271"/>
           </a:xfrm>
@@ -1671,7 +1664,7 @@
                 <a:ea typeface="Times New Roman" pitchFamily="34" charset="-122"/>
                 <a:cs typeface="Times New Roman" pitchFamily="34" charset="-120"/>
               </a:rPr>
-              <a:t>Flow</a:t>
+              <a:t>Learning objective</a:t>
             </a:r>
             <a:endParaRPr lang="en-US" sz="1800" dirty="0"/>
           </a:p>
@@ -1680,6 +1673,54 @@
       <p:sp>
         <p:nvSpPr>
           <p:cNvPr id="4" name="Text 2"/>
+          <p:cNvSpPr/>
+          <p:nvPr/>
+        </p:nvSpPr>
+        <p:spPr>
+          <a:xfrm>
+            <a:off x="406301" y="870942"/>
+            <a:ext cx="8498026" cy="213271"/>
+          </a:xfrm>
+          <a:prstGeom prst="rect">
+            <a:avLst/>
+          </a:prstGeom>
+          <a:noFill/>
+          <a:ln/>
+        </p:spPr>
+        <p:txBody>
+          <a:bodyPr wrap="square" lIns="0" tIns="0" rIns="0" bIns="0" rtlCol="0" anchor="t"/>
+          <a:lstStyle/>
+          <a:p>
+            <a:pPr algn="l" indent="0" marL="0">
+              <a:lnSpc>
+                <a:spcPts val="1680"/>
+              </a:lnSpc>
+              <a:spcBef>
+                <a:spcPts val="300"/>
+              </a:spcBef>
+              <a:spcAft>
+                <a:spcPts val="300"/>
+              </a:spcAft>
+              <a:buNone/>
+            </a:pPr>
+            <a:r>
+              <a:rPr lang="en-US" sz="1200" dirty="0">
+                <a:solidFill>
+                  <a:srgbClr val="1A1A1A"/>
+                </a:solidFill>
+                <a:latin typeface="Georgia" pitchFamily="34" charset="0"/>
+                <a:ea typeface="Georgia" pitchFamily="34" charset="-122"/>
+                <a:cs typeface="Georgia" pitchFamily="34" charset="-120"/>
+              </a:rPr>
+              <a:t>Students refine thesis, complete outline, identify the strongest counter-argument.</a:t>
+            </a:r>
+            <a:endParaRPr lang="en-US" sz="1200" dirty="0"/>
+          </a:p>
+        </p:txBody>
+      </p:sp>
+      <p:sp>
+        <p:nvSpPr>
+          <p:cNvPr id="5" name="Text 3"/>
           <p:cNvSpPr/>
           <p:nvPr/>
         </p:nvSpPr>
@@ -1829,7 +1870,7 @@
                 <a:ea typeface="Times New Roman" pitchFamily="34" charset="-122"/>
                 <a:cs typeface="Times New Roman" pitchFamily="34" charset="-120"/>
               </a:rPr>
-              <a:t>Sprints (40 min)</a:t>
+              <a:t>Flow</a:t>
             </a:r>
             <a:endParaRPr lang="en-US" sz="1800" dirty="0"/>
           </a:p>
@@ -1838,54 +1879,6 @@
       <p:sp>
         <p:nvSpPr>
           <p:cNvPr id="4" name="Text 2"/>
-          <p:cNvSpPr/>
-          <p:nvPr/>
-        </p:nvSpPr>
-        <p:spPr>
-          <a:xfrm>
-            <a:off x="406301" y="870942"/>
-            <a:ext cx="8498026" cy="426541"/>
-          </a:xfrm>
-          <a:prstGeom prst="rect">
-            <a:avLst/>
-          </a:prstGeom>
-          <a:noFill/>
-          <a:ln/>
-        </p:spPr>
-        <p:txBody>
-          <a:bodyPr wrap="square" lIns="0" tIns="0" rIns="0" bIns="0" rtlCol="0" anchor="t"/>
-          <a:lstStyle/>
-          <a:p>
-            <a:pPr algn="l" indent="0" marL="0">
-              <a:lnSpc>
-                <a:spcPts val="1680"/>
-              </a:lnSpc>
-              <a:spcBef>
-                <a:spcPts val="300"/>
-              </a:spcBef>
-              <a:spcAft>
-                <a:spcPts val="300"/>
-              </a:spcAft>
-              <a:buNone/>
-            </a:pPr>
-            <a:r>
-              <a:rPr lang="en-US" sz="1200" dirty="0">
-                <a:solidFill>
-                  <a:srgbClr val="1A1A1A"/>
-                </a:solidFill>
-                <a:latin typeface="Georgia" pitchFamily="34" charset="0"/>
-                <a:ea typeface="Georgia" pitchFamily="34" charset="-122"/>
-                <a:cs typeface="Georgia" pitchFamily="34" charset="-120"/>
-              </a:rPr>
-              <a:t>– 10 min: refine thesis + outline – 15 min: buddy critique — get the strongest counter-argument – 15 min: incorporate, draft introduction</a:t>
-            </a:r>
-            <a:endParaRPr lang="en-US" sz="1200" dirty="0"/>
-          </a:p>
-        </p:txBody>
-      </p:sp>
-      <p:sp>
-        <p:nvSpPr>
-          <p:cNvPr id="5" name="Text 3"/>
           <p:cNvSpPr/>
           <p:nvPr/>
         </p:nvSpPr>
@@ -2035,7 +2028,7 @@
                 <a:ea typeface="Times New Roman" pitchFamily="34" charset="-122"/>
                 <a:cs typeface="Times New Roman" pitchFamily="34" charset="-120"/>
               </a:rPr>
-              <a:t>Wrap-up (5 min)</a:t>
+              <a:t>Sprints (40 min)</a:t>
             </a:r>
             <a:endParaRPr lang="en-US" sz="1800" dirty="0"/>
           </a:p>
@@ -2049,8 +2042,8 @@
         </p:nvSpPr>
         <p:spPr>
           <a:xfrm>
-            <a:off x="406301" y="870942"/>
-            <a:ext cx="8498026" cy="213271"/>
+            <a:off x="634901" y="883593"/>
+            <a:ext cx="8102798" cy="769441"/>
           </a:xfrm>
           <a:prstGeom prst="rect">
             <a:avLst/>
@@ -2062,17 +2055,15 @@
           <a:bodyPr wrap="square" lIns="0" tIns="0" rIns="0" bIns="0" rtlCol="0" anchor="t"/>
           <a:lstStyle/>
           <a:p>
-            <a:pPr algn="l" indent="0" marL="0">
+            <a:pPr algn="l" marL="342900" indent="-342900">
               <a:lnSpc>
-                <a:spcPts val="1680"/>
+                <a:spcPts val="1620"/>
               </a:lnSpc>
-              <a:spcBef>
-                <a:spcPts val="300"/>
-              </a:spcBef>
               <a:spcAft>
                 <a:spcPts val="300"/>
               </a:spcAft>
-              <a:buNone/>
+              <a:buSzPct val="100000"/>
+              <a:buChar char="•"/>
             </a:pPr>
             <a:r>
               <a:rPr lang="en-US" sz="1200" dirty="0">
@@ -2083,7 +2074,55 @@
                 <a:ea typeface="Georgia" pitchFamily="34" charset="-122"/>
                 <a:cs typeface="Georgia" pitchFamily="34" charset="-120"/>
               </a:rPr>
-              <a:t>– Outline submitted.</a:t>
+              <a:t>10 min: refine thesis + outline</a:t>
+            </a:r>
+            <a:endParaRPr lang="en-US" sz="1200" dirty="0"/>
+          </a:p>
+          <a:p>
+            <a:pPr algn="l" marL="342900" indent="-342900">
+              <a:lnSpc>
+                <a:spcPts val="1620"/>
+              </a:lnSpc>
+              <a:spcAft>
+                <a:spcPts val="300"/>
+              </a:spcAft>
+              <a:buSzPct val="100000"/>
+              <a:buChar char="•"/>
+            </a:pPr>
+            <a:r>
+              <a:rPr lang="en-US" sz="1200" dirty="0">
+                <a:solidFill>
+                  <a:srgbClr val="1A1A1A"/>
+                </a:solidFill>
+                <a:latin typeface="Georgia" pitchFamily="34" charset="0"/>
+                <a:ea typeface="Georgia" pitchFamily="34" charset="-122"/>
+                <a:cs typeface="Georgia" pitchFamily="34" charset="-120"/>
+              </a:rPr>
+              <a:t>15 min: buddy critique — get the strongest counter-argument</a:t>
+            </a:r>
+            <a:endParaRPr lang="en-US" sz="1200" dirty="0"/>
+          </a:p>
+          <a:p>
+            <a:pPr algn="l" marL="342900" indent="-342900">
+              <a:lnSpc>
+                <a:spcPts val="1620"/>
+              </a:lnSpc>
+              <a:spcAft>
+                <a:spcPts val="300"/>
+              </a:spcAft>
+              <a:buSzPct val="100000"/>
+              <a:buChar char="•"/>
+            </a:pPr>
+            <a:r>
+              <a:rPr lang="en-US" sz="1200" dirty="0">
+                <a:solidFill>
+                  <a:srgbClr val="1A1A1A"/>
+                </a:solidFill>
+                <a:latin typeface="Georgia" pitchFamily="34" charset="0"/>
+                <a:ea typeface="Georgia" pitchFamily="34" charset="-122"/>
+                <a:cs typeface="Georgia" pitchFamily="34" charset="-120"/>
+              </a:rPr>
+              <a:t>15 min: incorporate, draft introduction</a:t>
             </a:r>
             <a:endParaRPr lang="en-US" sz="1200" dirty="0"/>
           </a:p>
@@ -2241,7 +2280,7 @@
                 <a:ea typeface="Times New Roman" pitchFamily="34" charset="-122"/>
                 <a:cs typeface="Times New Roman" pitchFamily="34" charset="-120"/>
               </a:rPr>
-              <a:t>Homework</a:t>
+              <a:t>Wrap-up (5 min)</a:t>
             </a:r>
             <a:endParaRPr lang="en-US" sz="1800" dirty="0"/>
           </a:p>
@@ -2255,7 +2294,53 @@
         </p:nvSpPr>
         <p:spPr>
           <a:xfrm>
-            <a:off x="406301" y="870942"/>
+            <a:off x="634901" y="883593"/>
+            <a:ext cx="8102798" cy="281880"/>
+          </a:xfrm>
+          <a:prstGeom prst="rect">
+            <a:avLst/>
+          </a:prstGeom>
+          <a:noFill/>
+          <a:ln/>
+        </p:spPr>
+        <p:txBody>
+          <a:bodyPr wrap="square" lIns="0" tIns="0" rIns="0" bIns="0" rtlCol="0" anchor="t"/>
+          <a:lstStyle/>
+          <a:p>
+            <a:pPr algn="l" marL="342900" indent="-342900">
+              <a:lnSpc>
+                <a:spcPts val="1620"/>
+              </a:lnSpc>
+              <a:spcAft>
+                <a:spcPts val="300"/>
+              </a:spcAft>
+              <a:buSzPct val="100000"/>
+              <a:buChar char="•"/>
+            </a:pPr>
+            <a:r>
+              <a:rPr lang="en-US" sz="1200" dirty="0">
+                <a:solidFill>
+                  <a:srgbClr val="1A1A1A"/>
+                </a:solidFill>
+                <a:latin typeface="Georgia" pitchFamily="34" charset="0"/>
+                <a:ea typeface="Georgia" pitchFamily="34" charset="-122"/>
+                <a:cs typeface="Georgia" pitchFamily="34" charset="-120"/>
+              </a:rPr>
+              <a:t>Outline submitted.</a:t>
+            </a:r>
+            <a:endParaRPr lang="en-US" sz="1200" dirty="0"/>
+          </a:p>
+        </p:txBody>
+      </p:sp>
+      <p:sp>
+        <p:nvSpPr>
+          <p:cNvPr id="5" name="Text 3"/>
+          <p:cNvSpPr/>
+          <p:nvPr/>
+        </p:nvSpPr>
+        <p:spPr>
+          <a:xfrm>
+            <a:off x="406301" y="4434929"/>
             <a:ext cx="8498026" cy="213271"/>
           </a:xfrm>
           <a:prstGeom prst="rect">
@@ -2289,7 +2374,163 @@
                 <a:ea typeface="Georgia" pitchFamily="34" charset="-122"/>
                 <a:cs typeface="Georgia" pitchFamily="34" charset="-120"/>
               </a:rPr>
-              <a:t>– Draft 1.5–2 pages tonight.</a:t>
+              <a:t>Senior ·  · IKS Curriculum</a:t>
+            </a:r>
+            <a:endParaRPr lang="en-US" sz="1200" dirty="0"/>
+          </a:p>
+        </p:txBody>
+      </p:sp>
+    </p:spTree>
+  </p:cSld>
+  <p:clrMapOvr>
+    <a:masterClrMapping/>
+  </p:clrMapOvr>
+</p:sld>
+</file>
+
+<file path=ppt/slides/slide6.xml><?xml version="1.0" encoding="utf-8"?>
+<p:sld xmlns:a="http://schemas.openxmlformats.org/drawingml/2006/main" xmlns:r="http://schemas.openxmlformats.org/officeDocument/2006/relationships" xmlns:p="http://schemas.openxmlformats.org/presentationml/2006/main">
+  <p:cSld name="Slide 6">
+    <p:bg>
+      <p:bgPr>
+        <a:solidFill>
+          <a:srgbClr val="FAF7F2"/>
+        </a:solidFill>
+      </p:bgPr>
+    </p:bg>
+    <p:spTree>
+      <p:nvGrpSpPr>
+        <p:cNvPr id="1" name=""/>
+        <p:cNvGrpSpPr/>
+        <p:nvPr/>
+      </p:nvGrpSpPr>
+      <p:grpSpPr>
+        <a:xfrm>
+          <a:off x="0" y="0"/>
+          <a:ext cx="0" cy="0"/>
+          <a:chOff x="0" y="0"/>
+          <a:chExt cx="0" cy="0"/>
+        </a:xfrm>
+      </p:grpSpPr>
+      <p:sp>
+        <p:nvSpPr>
+          <p:cNvPr id="2" name="Text 0"/>
+          <p:cNvSpPr/>
+          <p:nvPr/>
+        </p:nvSpPr>
+        <p:spPr>
+          <a:xfrm>
+            <a:off x="0" y="0"/>
+            <a:ext cx="9144000" cy="101501"/>
+          </a:xfrm>
+          <a:prstGeom prst="rect">
+            <a:avLst/>
+          </a:prstGeom>
+          <a:solidFill>
+            <a:srgbClr val="5D1D2E"/>
+          </a:solidFill>
+          <a:ln/>
+        </p:spPr>
+        <p:txBody>
+          <a:bodyPr wrap="square" rtlCol="0" anchor="ctr"/>
+          <a:lstStyle/>
+          <a:p>
+            <a:pPr indent="0" marL="0">
+              <a:buNone/>
+            </a:pPr>
+            <a:endParaRPr lang="en-US" dirty="0"/>
+          </a:p>
+        </p:txBody>
+      </p:sp>
+      <p:sp>
+        <p:nvSpPr>
+          <p:cNvPr id="3" name="Text 1"/>
+          <p:cNvSpPr/>
+          <p:nvPr/>
+        </p:nvSpPr>
+        <p:spPr>
+          <a:xfrm>
+            <a:off x="406301" y="457051"/>
+            <a:ext cx="8498026" cy="274290"/>
+          </a:xfrm>
+          <a:prstGeom prst="rect">
+            <a:avLst/>
+          </a:prstGeom>
+          <a:noFill/>
+          <a:ln/>
+        </p:spPr>
+        <p:txBody>
+          <a:bodyPr wrap="square" lIns="0" tIns="0" rIns="0" bIns="0" rtlCol="0" anchor="t"/>
+          <a:lstStyle/>
+          <a:p>
+            <a:pPr algn="l" indent="0" marL="0">
+              <a:lnSpc>
+                <a:spcPts val="2160"/>
+              </a:lnSpc>
+              <a:spcBef>
+                <a:spcPts val="600"/>
+              </a:spcBef>
+              <a:spcAft>
+                <a:spcPts val="800"/>
+              </a:spcAft>
+              <a:buNone/>
+            </a:pPr>
+            <a:r>
+              <a:rPr lang="en-US" sz="1800" b="1" dirty="0">
+                <a:solidFill>
+                  <a:srgbClr val="997929"/>
+                </a:solidFill>
+                <a:latin typeface="Times New Roman" pitchFamily="34" charset="0"/>
+                <a:ea typeface="Times New Roman" pitchFamily="34" charset="-122"/>
+                <a:cs typeface="Times New Roman" pitchFamily="34" charset="-120"/>
+              </a:rPr>
+              <a:t>Homework</a:t>
+            </a:r>
+            <a:endParaRPr lang="en-US" sz="1800" dirty="0"/>
+          </a:p>
+        </p:txBody>
+      </p:sp>
+      <p:sp>
+        <p:nvSpPr>
+          <p:cNvPr id="4" name="Text 2"/>
+          <p:cNvSpPr/>
+          <p:nvPr/>
+        </p:nvSpPr>
+        <p:spPr>
+          <a:xfrm>
+            <a:off x="634901" y="883593"/>
+            <a:ext cx="8102798" cy="281880"/>
+          </a:xfrm>
+          <a:prstGeom prst="rect">
+            <a:avLst/>
+          </a:prstGeom>
+          <a:noFill/>
+          <a:ln/>
+        </p:spPr>
+        <p:txBody>
+          <a:bodyPr wrap="square" lIns="0" tIns="0" rIns="0" bIns="0" rtlCol="0" anchor="t"/>
+          <a:lstStyle/>
+          <a:p>
+            <a:pPr algn="l" marL="342900" indent="-342900">
+              <a:lnSpc>
+                <a:spcPts val="1620"/>
+              </a:lnSpc>
+              <a:spcAft>
+                <a:spcPts val="300"/>
+              </a:spcAft>
+              <a:buSzPct val="100000"/>
+              <a:buChar char="•"/>
+            </a:pPr>
+            <a:r>
+              <a:rPr lang="en-US" sz="1200" dirty="0">
+                <a:solidFill>
+                  <a:srgbClr val="1A1A1A"/>
+                </a:solidFill>
+                <a:latin typeface="Georgia" pitchFamily="34" charset="0"/>
+                <a:ea typeface="Georgia" pitchFamily="34" charset="-122"/>
+                <a:cs typeface="Georgia" pitchFamily="34" charset="-120"/>
+              </a:rPr>
+              <a:t>Draft 1.5–2 pages tonight.</a:t>
             </a:r>
             <a:endParaRPr lang="en-US" sz="1200" dirty="0"/>
           </a:p>
